--- a/Deploying Deep Learning Models on Kubernetes with GPU.pptx
+++ b/Deploying Deep Learning Models on Kubernetes with GPU.pptx
@@ -201,7 +201,7 @@
           <a:p>
             <a:fld id="{43DA0A24-8F73-440D-9695-CACB93E3DC8C}" type="datetimeFigureOut">
               <a:rPr lang="en-US" smtClean="0"/>
-              <a:t>9/1/2025</a:t>
+              <a:t>9/18/2026</a:t>
             </a:fld>
             <a:endParaRPr lang="en-US"/>
           </a:p>
@@ -878,7 +878,7 @@
           <a:p>
             <a:fld id="{48A87A34-81AB-432B-8DAE-1953F412C126}" type="datetimeFigureOut">
               <a:rPr lang="en-US" smtClean="0"/>
-              <a:t>9/1/2025</a:t>
+              <a:t>9/18/2026</a:t>
             </a:fld>
             <a:endParaRPr lang="en-US" dirty="0"/>
           </a:p>
@@ -1048,7 +1048,7 @@
           <a:p>
             <a:fld id="{48A87A34-81AB-432B-8DAE-1953F412C126}" type="datetimeFigureOut">
               <a:rPr lang="en-US" smtClean="0"/>
-              <a:t>9/1/2025</a:t>
+              <a:t>9/18/2026</a:t>
             </a:fld>
             <a:endParaRPr lang="en-US" dirty="0"/>
           </a:p>
@@ -1228,7 +1228,7 @@
           <a:p>
             <a:fld id="{48A87A34-81AB-432B-8DAE-1953F412C126}" type="datetimeFigureOut">
               <a:rPr lang="en-US" smtClean="0"/>
-              <a:t>9/1/2025</a:t>
+              <a:t>9/18/2026</a:t>
             </a:fld>
             <a:endParaRPr lang="en-US" dirty="0"/>
           </a:p>
@@ -1398,7 +1398,7 @@
           <a:p>
             <a:fld id="{48A87A34-81AB-432B-8DAE-1953F412C126}" type="datetimeFigureOut">
               <a:rPr lang="en-US" smtClean="0"/>
-              <a:t>9/1/2025</a:t>
+              <a:t>9/18/2026</a:t>
             </a:fld>
             <a:endParaRPr lang="en-US" dirty="0"/>
           </a:p>
@@ -1644,7 +1644,7 @@
           <a:p>
             <a:fld id="{48A87A34-81AB-432B-8DAE-1953F412C126}" type="datetimeFigureOut">
               <a:rPr lang="en-US" smtClean="0"/>
-              <a:t>9/1/2025</a:t>
+              <a:t>9/18/2026</a:t>
             </a:fld>
             <a:endParaRPr lang="en-US" dirty="0"/>
           </a:p>
@@ -1876,7 +1876,7 @@
           <a:p>
             <a:fld id="{48A87A34-81AB-432B-8DAE-1953F412C126}" type="datetimeFigureOut">
               <a:rPr lang="en-US" smtClean="0"/>
-              <a:t>9/1/2025</a:t>
+              <a:t>9/18/2026</a:t>
             </a:fld>
             <a:endParaRPr lang="en-US" dirty="0"/>
           </a:p>
@@ -2243,7 +2243,7 @@
           <a:p>
             <a:fld id="{48A87A34-81AB-432B-8DAE-1953F412C126}" type="datetimeFigureOut">
               <a:rPr lang="en-US" smtClean="0"/>
-              <a:t>9/1/2025</a:t>
+              <a:t>9/18/2026</a:t>
             </a:fld>
             <a:endParaRPr lang="en-US" dirty="0"/>
           </a:p>
@@ -2361,7 +2361,7 @@
           <a:p>
             <a:fld id="{48A87A34-81AB-432B-8DAE-1953F412C126}" type="datetimeFigureOut">
               <a:rPr lang="en-US" smtClean="0"/>
-              <a:t>9/1/2025</a:t>
+              <a:t>9/18/2026</a:t>
             </a:fld>
             <a:endParaRPr lang="en-US" dirty="0"/>
           </a:p>
@@ -2456,7 +2456,7 @@
           <a:p>
             <a:fld id="{48A87A34-81AB-432B-8DAE-1953F412C126}" type="datetimeFigureOut">
               <a:rPr lang="en-US" smtClean="0"/>
-              <a:t>9/1/2025</a:t>
+              <a:t>9/18/2026</a:t>
             </a:fld>
             <a:endParaRPr lang="en-US" dirty="0"/>
           </a:p>
@@ -2733,7 +2733,7 @@
           <a:p>
             <a:fld id="{48A87A34-81AB-432B-8DAE-1953F412C126}" type="datetimeFigureOut">
               <a:rPr lang="en-US" smtClean="0"/>
-              <a:t>9/1/2025</a:t>
+              <a:t>9/18/2026</a:t>
             </a:fld>
             <a:endParaRPr lang="en-US" dirty="0"/>
           </a:p>
@@ -2986,7 +2986,7 @@
           <a:p>
             <a:fld id="{48A87A34-81AB-432B-8DAE-1953F412C126}" type="datetimeFigureOut">
               <a:rPr lang="en-US" smtClean="0"/>
-              <a:t>9/1/2025</a:t>
+              <a:t>9/18/2026</a:t>
             </a:fld>
             <a:endParaRPr lang="en-US" dirty="0"/>
           </a:p>
@@ -3200,7 +3200,7 @@
             <a:fld id="{48A87A34-81AB-432B-8DAE-1953F412C126}" type="datetimeFigureOut">
               <a:rPr lang="en-US" smtClean="0"/>
               <a:pPr/>
-              <a:t>9/1/2025</a:t>
+              <a:t>9/18/2026</a:t>
             </a:fld>
             <a:endParaRPr lang="en-US" dirty="0"/>
           </a:p>
@@ -4989,95 +4989,6 @@
           </p:txBody>
         </p:sp>
       </p:grpSp>
-      <p:sp>
-        <p:nvSpPr>
-          <p:cNvPr id="22" name="Rectangle 21"/>
-          <p:cNvSpPr/>
-          <p:nvPr/>
-        </p:nvSpPr>
-        <p:spPr>
-          <a:xfrm>
-            <a:off x="8911525" y="5781051"/>
-            <a:ext cx="3485015" cy="276999"/>
-          </a:xfrm>
-          <a:prstGeom prst="rect">
-            <a:avLst/>
-          </a:prstGeom>
-        </p:spPr>
-        <p:txBody>
-          <a:bodyPr wrap="square">
-            <a:spAutoFit/>
-          </a:bodyPr>
-          <a:lstStyle/>
-          <a:p>
-            <a:r>
-              <a:rPr lang="en-US" sz="1200" dirty="0"/>
-              <a:t>https://www.youtube.com/@AmelOline/videos</a:t>
-            </a:r>
-          </a:p>
-        </p:txBody>
-      </p:sp>
-      <p:sp>
-        <p:nvSpPr>
-          <p:cNvPr id="23" name="Rectangle 22"/>
-          <p:cNvSpPr/>
-          <p:nvPr/>
-        </p:nvSpPr>
-        <p:spPr>
-          <a:xfrm>
-            <a:off x="10027402" y="5596385"/>
-            <a:ext cx="2164597" cy="276999"/>
-          </a:xfrm>
-          <a:prstGeom prst="rect">
-            <a:avLst/>
-          </a:prstGeom>
-        </p:spPr>
-        <p:txBody>
-          <a:bodyPr wrap="square">
-            <a:spAutoFit/>
-          </a:bodyPr>
-          <a:lstStyle/>
-          <a:p>
-            <a:r>
-              <a:rPr lang="en-US" sz="1200" dirty="0"/>
-              <a:t>https://github.com/siagianp</a:t>
-            </a:r>
-          </a:p>
-        </p:txBody>
-      </p:sp>
-      <p:sp>
-        <p:nvSpPr>
-          <p:cNvPr id="2" name="Rectangle 1"/>
-          <p:cNvSpPr/>
-          <p:nvPr/>
-        </p:nvSpPr>
-        <p:spPr>
-          <a:xfrm>
-            <a:off x="7609668" y="5965717"/>
-            <a:ext cx="4889592" cy="276999"/>
-          </a:xfrm>
-          <a:prstGeom prst="rect">
-            <a:avLst/>
-          </a:prstGeom>
-        </p:spPr>
-        <p:txBody>
-          <a:bodyPr wrap="square">
-            <a:spAutoFit/>
-          </a:bodyPr>
-          <a:lstStyle/>
-          <a:p>
-            <a:r>
-              <a:rPr lang="en-US" sz="1200" dirty="0"/>
-              <a:t>https</a:t>
-            </a:r>
-            <a:r>
-              <a:rPr lang="en-US" sz="1200" dirty="0" smtClean="0"/>
-              <a:t>://github.com/amelcharolinesgn2/IoT_simulator-mqtt-NodeRed</a:t>
-            </a:r>
-            <a:endParaRPr lang="en-US" sz="1200" dirty="0"/>
-          </a:p>
-        </p:txBody>
-      </p:sp>
       <p:pic>
         <p:nvPicPr>
           <p:cNvPr id="4" name="Picture 3"/>
@@ -5401,58 +5312,431 @@
       </p:sp>
       <p:sp>
         <p:nvSpPr>
-          <p:cNvPr id="3" name="Rectangle 2"/>
+          <p:cNvPr id="25" name="Rectangle 24"/>
           <p:cNvSpPr/>
           <p:nvPr/>
         </p:nvSpPr>
         <p:spPr>
           <a:xfrm>
-            <a:off x="8203920" y="6150383"/>
-            <a:ext cx="3988079" cy="276999"/>
+            <a:off x="9637138" y="6285319"/>
+            <a:ext cx="2218246" cy="169277"/>
           </a:xfrm>
           <a:prstGeom prst="rect">
             <a:avLst/>
           </a:prstGeom>
         </p:spPr>
         <p:txBody>
-          <a:bodyPr wrap="none">
+          <a:bodyPr wrap="square">
             <a:spAutoFit/>
           </a:bodyPr>
           <a:lstStyle/>
           <a:p>
             <a:r>
-              <a:rPr lang="en-US" sz="1200" dirty="0"/>
-              <a:t>https://github.com/amelcharolinesgn2/Cloud-Infrastructures</a:t>
-            </a:r>
-          </a:p>
-        </p:txBody>
-      </p:sp>
-      <p:sp>
-        <p:nvSpPr>
-          <p:cNvPr id="24" name="Rectangle 23"/>
+              <a:rPr lang="en-US" sz="500" dirty="0"/>
+              <a:t>https</a:t>
+            </a:r>
+            <a:r>
+              <a:rPr lang="en-US" sz="500" dirty="0" smtClean="0"/>
+              <a:t>://github.com/amelcharolinesgn2/IoT_simulator-mqtt-NodeRed</a:t>
+            </a:r>
+            <a:endParaRPr lang="en-US" sz="500" dirty="0"/>
+          </a:p>
+        </p:txBody>
+      </p:sp>
+      <p:sp>
+        <p:nvSpPr>
+          <p:cNvPr id="28" name="Rectangle 27"/>
           <p:cNvSpPr/>
           <p:nvPr/>
         </p:nvSpPr>
         <p:spPr>
           <a:xfrm>
-            <a:off x="7493791" y="6381215"/>
-            <a:ext cx="4698209" cy="276999"/>
+            <a:off x="10303721" y="5650405"/>
+            <a:ext cx="1301349" cy="150490"/>
           </a:xfrm>
           <a:prstGeom prst="rect">
             <a:avLst/>
           </a:prstGeom>
         </p:spPr>
         <p:txBody>
+          <a:bodyPr wrap="square">
+            <a:spAutoFit/>
+          </a:bodyPr>
+          <a:lstStyle/>
+          <a:p>
+            <a:pPr algn="r"/>
+            <a:r>
+              <a:rPr lang="en-US" sz="378" dirty="0"/>
+              <a:t>https://www.youtube.com/@AmelOline/videos</a:t>
+            </a:r>
+          </a:p>
+        </p:txBody>
+      </p:sp>
+      <p:sp>
+        <p:nvSpPr>
+          <p:cNvPr id="29" name="Rectangle 28"/>
+          <p:cNvSpPr/>
+          <p:nvPr/>
+        </p:nvSpPr>
+        <p:spPr>
+          <a:xfrm>
+            <a:off x="10716292" y="5588105"/>
+            <a:ext cx="879077" cy="150490"/>
+          </a:xfrm>
+          <a:prstGeom prst="rect">
+            <a:avLst/>
+          </a:prstGeom>
+        </p:spPr>
+        <p:txBody>
+          <a:bodyPr wrap="square">
+            <a:spAutoFit/>
+          </a:bodyPr>
+          <a:lstStyle/>
+          <a:p>
+            <a:pPr algn="r"/>
+            <a:r>
+              <a:rPr lang="en-US" sz="378" dirty="0"/>
+              <a:t>https://github.com/siagianp</a:t>
+            </a:r>
+          </a:p>
+        </p:txBody>
+      </p:sp>
+      <p:sp>
+        <p:nvSpPr>
+          <p:cNvPr id="30" name="Rectangle 29"/>
+          <p:cNvSpPr/>
+          <p:nvPr/>
+        </p:nvSpPr>
+        <p:spPr>
+          <a:xfrm>
+            <a:off x="10152989" y="5722004"/>
+            <a:ext cx="1452642" cy="150490"/>
+          </a:xfrm>
+          <a:prstGeom prst="rect">
+            <a:avLst/>
+          </a:prstGeom>
+        </p:spPr>
+        <p:txBody>
           <a:bodyPr wrap="none">
             <a:spAutoFit/>
           </a:bodyPr>
           <a:lstStyle/>
           <a:p>
-            <a:r>
-              <a:rPr lang="en-US" sz="1200" dirty="0"/>
+            <a:pPr algn="r"/>
+            <a:r>
+              <a:rPr lang="en-US" sz="378" dirty="0"/>
+              <a:t>https://github.com/amelcharolinesgn2/Cloud-Infrastructures</a:t>
+            </a:r>
+          </a:p>
+        </p:txBody>
+      </p:sp>
+      <p:sp>
+        <p:nvSpPr>
+          <p:cNvPr id="31" name="Rectangle 30"/>
+          <p:cNvSpPr/>
+          <p:nvPr/>
+        </p:nvSpPr>
+        <p:spPr>
+          <a:xfrm>
+            <a:off x="9886891" y="5786030"/>
+            <a:ext cx="1718740" cy="150490"/>
+          </a:xfrm>
+          <a:prstGeom prst="rect">
+            <a:avLst/>
+          </a:prstGeom>
+        </p:spPr>
+        <p:txBody>
+          <a:bodyPr wrap="none">
+            <a:spAutoFit/>
+          </a:bodyPr>
+          <a:lstStyle/>
+          <a:p>
+            <a:pPr algn="r"/>
+            <a:r>
+              <a:rPr lang="en-US" sz="378" dirty="0"/>
               <a:t>https://github.com/amelcharolinesgn2/ClouD-Infrastructure-SISKA-2025</a:t>
             </a:r>
-            <a:endParaRPr lang="en-US" sz="1200" dirty="0"/>
+          </a:p>
+        </p:txBody>
+      </p:sp>
+      <p:sp>
+        <p:nvSpPr>
+          <p:cNvPr id="32" name="Rectangle 31"/>
+          <p:cNvSpPr/>
+          <p:nvPr/>
+        </p:nvSpPr>
+        <p:spPr>
+          <a:xfrm>
+            <a:off x="10303721" y="5836973"/>
+            <a:ext cx="1301349" cy="150490"/>
+          </a:xfrm>
+          <a:prstGeom prst="rect">
+            <a:avLst/>
+          </a:prstGeom>
+        </p:spPr>
+        <p:txBody>
+          <a:bodyPr wrap="square">
+            <a:spAutoFit/>
+          </a:bodyPr>
+          <a:lstStyle/>
+          <a:p>
+            <a:pPr algn="r"/>
+            <a:r>
+              <a:rPr lang="en-US" sz="378" dirty="0"/>
+              <a:t>https://</a:t>
+            </a:r>
+            <a:r>
+              <a:rPr lang="en-US" sz="378" dirty="0" smtClean="0"/>
+              <a:t>github.com/amelcharolinesgn2/CCNA-1-v7</a:t>
+            </a:r>
+            <a:endParaRPr lang="en-US" sz="378" dirty="0"/>
+          </a:p>
+        </p:txBody>
+      </p:sp>
+      <p:sp>
+        <p:nvSpPr>
+          <p:cNvPr id="33" name="Rectangle 32"/>
+          <p:cNvSpPr/>
+          <p:nvPr/>
+        </p:nvSpPr>
+        <p:spPr>
+          <a:xfrm>
+            <a:off x="10303721" y="5898653"/>
+            <a:ext cx="1301349" cy="150490"/>
+          </a:xfrm>
+          <a:prstGeom prst="rect">
+            <a:avLst/>
+          </a:prstGeom>
+        </p:spPr>
+        <p:txBody>
+          <a:bodyPr wrap="square">
+            <a:spAutoFit/>
+          </a:bodyPr>
+          <a:lstStyle/>
+          <a:p>
+            <a:pPr algn="r"/>
+            <a:r>
+              <a:rPr lang="en-US" sz="378" dirty="0"/>
+              <a:t>https://</a:t>
+            </a:r>
+            <a:r>
+              <a:rPr lang="en-US" sz="378" dirty="0" smtClean="0"/>
+              <a:t>github.com/amelcharolinesgn2/CCNA-2-v7</a:t>
+            </a:r>
+            <a:endParaRPr lang="en-US" sz="378" dirty="0"/>
+          </a:p>
+        </p:txBody>
+      </p:sp>
+      <p:sp>
+        <p:nvSpPr>
+          <p:cNvPr id="34" name="Rectangle 33"/>
+          <p:cNvSpPr/>
+          <p:nvPr/>
+        </p:nvSpPr>
+        <p:spPr>
+          <a:xfrm>
+            <a:off x="10304843" y="6154541"/>
+            <a:ext cx="1301349" cy="208647"/>
+          </a:xfrm>
+          <a:prstGeom prst="rect">
+            <a:avLst/>
+          </a:prstGeom>
+        </p:spPr>
+        <p:txBody>
+          <a:bodyPr wrap="square">
+            <a:spAutoFit/>
+          </a:bodyPr>
+          <a:lstStyle/>
+          <a:p>
+            <a:pPr algn="r"/>
+            <a:r>
+              <a:rPr lang="en-US" sz="378" dirty="0">
+                <a:hlinkClick r:id="rId8"/>
+              </a:rPr>
+              <a:t>https://github.com/amelcharolinesgn2/AWS</a:t>
+            </a:r>
+            <a:r>
+              <a:rPr lang="en-US" sz="378" dirty="0"/>
+              <a:t> Certificate</a:t>
+            </a:r>
+          </a:p>
+        </p:txBody>
+      </p:sp>
+      <p:sp>
+        <p:nvSpPr>
+          <p:cNvPr id="35" name="Rectangle 34"/>
+          <p:cNvSpPr/>
+          <p:nvPr/>
+        </p:nvSpPr>
+        <p:spPr>
+          <a:xfrm>
+            <a:off x="10304843" y="6212698"/>
+            <a:ext cx="1301349" cy="150490"/>
+          </a:xfrm>
+          <a:prstGeom prst="rect">
+            <a:avLst/>
+          </a:prstGeom>
+        </p:spPr>
+        <p:txBody>
+          <a:bodyPr wrap="square">
+            <a:spAutoFit/>
+          </a:bodyPr>
+          <a:lstStyle/>
+          <a:p>
+            <a:pPr algn="r"/>
+            <a:r>
+              <a:rPr lang="en-US" sz="378" dirty="0">
+                <a:hlinkClick r:id="rId8"/>
+              </a:rPr>
+              <a:t>https://</a:t>
+            </a:r>
+            <a:r>
+              <a:rPr lang="en-US" sz="378" dirty="0" smtClean="0">
+                <a:hlinkClick r:id="rId8"/>
+              </a:rPr>
+              <a:t>github.com/amelcharolinesgn2/OpenStack</a:t>
+            </a:r>
+            <a:endParaRPr lang="en-US" sz="378" dirty="0"/>
+          </a:p>
+        </p:txBody>
+      </p:sp>
+      <p:sp>
+        <p:nvSpPr>
+          <p:cNvPr id="36" name="Rectangle 35"/>
+          <p:cNvSpPr/>
+          <p:nvPr/>
+        </p:nvSpPr>
+        <p:spPr>
+          <a:xfrm>
+            <a:off x="10304282" y="6096012"/>
+            <a:ext cx="1301349" cy="150490"/>
+          </a:xfrm>
+          <a:prstGeom prst="rect">
+            <a:avLst/>
+          </a:prstGeom>
+        </p:spPr>
+        <p:txBody>
+          <a:bodyPr wrap="square">
+            <a:spAutoFit/>
+          </a:bodyPr>
+          <a:lstStyle/>
+          <a:p>
+            <a:pPr algn="r"/>
+            <a:r>
+              <a:rPr lang="en-US" sz="378" dirty="0">
+                <a:hlinkClick r:id="rId8"/>
+              </a:rPr>
+              <a:t>https://</a:t>
+            </a:r>
+            <a:r>
+              <a:rPr lang="en-US" sz="378" dirty="0" smtClean="0">
+                <a:hlinkClick r:id="rId8"/>
+              </a:rPr>
+              <a:t>github.com/amelcharolinesgn2/CloudSim</a:t>
+            </a:r>
+            <a:endParaRPr lang="en-US" sz="378" dirty="0"/>
+          </a:p>
+        </p:txBody>
+      </p:sp>
+      <p:sp>
+        <p:nvSpPr>
+          <p:cNvPr id="37" name="Rectangle 36"/>
+          <p:cNvSpPr/>
+          <p:nvPr/>
+        </p:nvSpPr>
+        <p:spPr>
+          <a:xfrm>
+            <a:off x="10303160" y="5958763"/>
+            <a:ext cx="1301349" cy="150490"/>
+          </a:xfrm>
+          <a:prstGeom prst="rect">
+            <a:avLst/>
+          </a:prstGeom>
+        </p:spPr>
+        <p:txBody>
+          <a:bodyPr wrap="square">
+            <a:spAutoFit/>
+          </a:bodyPr>
+          <a:lstStyle/>
+          <a:p>
+            <a:pPr algn="r"/>
+            <a:r>
+              <a:rPr lang="en-US" sz="378" dirty="0"/>
+              <a:t>https://</a:t>
+            </a:r>
+            <a:r>
+              <a:rPr lang="en-US" sz="378" dirty="0" smtClean="0"/>
+              <a:t>github.com/amelcharolinesgn2/CCNA-3-v7</a:t>
+            </a:r>
+            <a:endParaRPr lang="en-US" sz="378" dirty="0"/>
+          </a:p>
+        </p:txBody>
+      </p:sp>
+      <p:sp>
+        <p:nvSpPr>
+          <p:cNvPr id="38" name="Rectangle 37"/>
+          <p:cNvSpPr/>
+          <p:nvPr/>
+        </p:nvSpPr>
+        <p:spPr>
+          <a:xfrm>
+            <a:off x="10303160" y="6007697"/>
+            <a:ext cx="1301349" cy="150490"/>
+          </a:xfrm>
+          <a:prstGeom prst="rect">
+            <a:avLst/>
+          </a:prstGeom>
+        </p:spPr>
+        <p:txBody>
+          <a:bodyPr wrap="square">
+            <a:spAutoFit/>
+          </a:bodyPr>
+          <a:lstStyle/>
+          <a:p>
+            <a:pPr algn="r"/>
+            <a:r>
+              <a:rPr lang="en-US" sz="378" dirty="0"/>
+              <a:t>https://</a:t>
+            </a:r>
+            <a:r>
+              <a:rPr lang="en-US" sz="378" dirty="0" smtClean="0"/>
+              <a:t>github.com/amelcharolinesgn2/CCNA-4-v7</a:t>
+            </a:r>
+            <a:endParaRPr lang="en-US" sz="378" dirty="0"/>
+          </a:p>
+        </p:txBody>
+      </p:sp>
+      <p:sp>
+        <p:nvSpPr>
+          <p:cNvPr id="39" name="Rectangle 38"/>
+          <p:cNvSpPr/>
+          <p:nvPr/>
+        </p:nvSpPr>
+        <p:spPr>
+          <a:xfrm>
+            <a:off x="10186479" y="6055438"/>
+            <a:ext cx="1408890" cy="150490"/>
+          </a:xfrm>
+          <a:prstGeom prst="rect">
+            <a:avLst/>
+          </a:prstGeom>
+        </p:spPr>
+        <p:txBody>
+          <a:bodyPr wrap="square">
+            <a:spAutoFit/>
+          </a:bodyPr>
+          <a:lstStyle/>
+          <a:p>
+            <a:pPr algn="r"/>
+            <a:r>
+              <a:rPr lang="en-US" sz="378" dirty="0"/>
+              <a:t>https://</a:t>
+            </a:r>
+            <a:r>
+              <a:rPr lang="en-US" sz="378" dirty="0" smtClean="0"/>
+              <a:t>github.com/amelcharolinesgn2/ANJAR_CCNP_Lab</a:t>
+            </a:r>
+            <a:endParaRPr lang="en-US" sz="378" dirty="0"/>
           </a:p>
         </p:txBody>
       </p:sp>
